--- a/public/fun/pack/pptx/newspro/카드뉴스프리미엄_41_알뜰생활팁_플래티넘아이스.pptx
+++ b/public/fun/pack/pptx/newspro/카드뉴스프리미엄_41_알뜰생활팁_플래티넘아이스.pptx
@@ -113,12 +113,12 @@
   <p:extLst>
     <p:ext uri="{521415D9-36F7-43E2-AB2F-B90AF26B5E84}">
       <p14:sectionLst xmlns:p14="http://schemas.microsoft.com/office/powerpoint/2010/main">
-        <p14:section name="시작" id="{EBDB52F4-0DB9-4A34-B246-DF4CA0314038}">
+        <p14:section name="시작" id="{988E0E96-D587-4066-888D-F3613E6FD08D}">
           <p14:sldIdLst>
             <p14:sldId id="256"/>
           </p14:sldIdLst>
         </p14:section>
-        <p14:section name="본문" id="{5E029AE7-D0A5-4A6F-8FE3-D7C0565A4357}">
+        <p14:section name="본문" id="{E3CDBE9F-9A87-4873-863C-33799C917229}">
           <p14:sldIdLst>
             <p14:sldId id="257"/>
             <p14:sldId id="258"/>
@@ -127,7 +127,7 @@
             <p14:sldId id="261"/>
           </p14:sldIdLst>
         </p14:section>
-        <p14:section name="마무리" id="{71B20346-BBC6-4B9B-A4BB-6ABFCF013758}">
+        <p14:section name="마무리" id="{1F656BB7-0DE2-4F16-B18F-4C8FDDFEFA16}">
           <p14:sldIdLst>
             <p14:sldId id="262"/>
           </p14:sldIdLst>
@@ -2483,7 +2483,7 @@
             </a:lvl1pPr>
           </a:lstStyle>
           <a:p>
-            <a:fld id="{CFA729DA-A57B-4140-9D60-EA502843E92E}" type="slidenum">
+            <a:fld id="{459E2767-F0E8-49CC-B1D3-29648BAD9E01}" type="slidenum">
               <a:rPr lang="en-US"/>
               <a:t>‹#›</a:t>
             </a:fld>
@@ -4069,7 +4069,7 @@
             </a:lvl1pPr>
           </a:lstStyle>
           <a:p>
-            <a:fld id="{297B0CB4-8C3D-4057-B5F9-0A05ADD8C4A5}" type="slidenum">
+            <a:fld id="{8D6160B2-5F49-4BE4-B6E9-B8D74FDBBF03}" type="slidenum">
               <a:rPr lang="en-US"/>
               <a:t>‹#›</a:t>
             </a:fld>
@@ -4706,7 +4706,7 @@
             </a:lvl1pPr>
           </a:lstStyle>
           <a:p>
-            <a:fld id="{08A493D3-22E6-4259-ADAA-4A2D0E5740F0}" type="slidenum">
+            <a:fld id="{D8C08800-D34D-416B-A529-A60C2F4B171A}" type="slidenum">
               <a:rPr lang="en-US"/>
               <a:t>‹#›</a:t>
             </a:fld>
@@ -5523,7 +5523,7 @@
           <a:p>
             <a:r>
               <a:rPr lang="ko-KR"/>
-              <a:t>연말 모임비 부담 줄이는 법</a:t>
+              <a:t>모임비 부담 줄이는 법</a:t>
             </a:r>
           </a:p>
         </p:txBody>
@@ -5652,7 +5652,7 @@
           <a:bodyPr/>
           <a:lstStyle/>
           <a:p>
-            <a:fld id="{545D2EA0-E38B-4907-B2CA-DCAFE12AC209}" type="slidenum">
+            <a:fld id="{85B4FB6C-91A8-4E6B-B955-E1D1D3B706D3}" type="slidenum">
               <a:rPr lang="en-US"/>
               <a:t>‹#›</a:t>
             </a:fld>
@@ -5818,7 +5818,7 @@
           <a:bodyPr/>
           <a:lstStyle/>
           <a:p>
-            <a:fld id="{6205FE0C-EDE4-4AC1-A968-164CC50E31B1}" type="slidenum">
+            <a:fld id="{B67C24A9-B5D1-44CD-8CCD-7ED0A618D315}" type="slidenum">
               <a:rPr lang="en-US"/>
               <a:t>‹#›</a:t>
             </a:fld>
@@ -5984,7 +5984,7 @@
           <a:bodyPr/>
           <a:lstStyle/>
           <a:p>
-            <a:fld id="{807B8ACD-805B-43C7-B2E1-F67FD41B34F9}" type="slidenum">
+            <a:fld id="{191433BB-398B-45D2-BD82-4220D9B1E102}" type="slidenum">
               <a:rPr lang="en-US"/>
               <a:t>‹#›</a:t>
             </a:fld>
@@ -6150,7 +6150,7 @@
           <a:bodyPr/>
           <a:lstStyle/>
           <a:p>
-            <a:fld id="{7FC9A410-E182-4B5F-B4AA-128A8A35BE5B}" type="slidenum">
+            <a:fld id="{FBF16483-A498-4613-B326-DD08B1A934C5}" type="slidenum">
               <a:rPr lang="en-US"/>
               <a:t>‹#›</a:t>
             </a:fld>
@@ -6316,7 +6316,7 @@
           <a:bodyPr/>
           <a:lstStyle/>
           <a:p>
-            <a:fld id="{D0A2F95E-0507-4CD3-944E-4ABCB4797215}" type="slidenum">
+            <a:fld id="{3154393C-B52F-4E7A-9AE7-982AADD81623}" type="slidenum">
               <a:rPr lang="en-US"/>
               <a:t>‹#›</a:t>
             </a:fld>
